--- a/public/fun/pack/pptx/newspro/카드뉴스프리미엄_12_건강·안심습관_누드모카.pptx
+++ b/public/fun/pack/pptx/newspro/카드뉴스프리미엄_12_건강·안심습관_누드모카.pptx
@@ -113,12 +113,12 @@
   <p:extLst>
     <p:ext uri="{521415D9-36F7-43E2-AB2F-B90AF26B5E84}">
       <p14:sectionLst xmlns:p14="http://schemas.microsoft.com/office/powerpoint/2010/main">
-        <p14:section name="시작" id="{629830B3-9A81-4830-BD13-03AC9317C4C6}">
+        <p14:section name="시작" id="{A1C31F2E-85E8-4A4E-AFAC-1D6879D5D169}">
           <p14:sldIdLst>
             <p14:sldId id="256"/>
           </p14:sldIdLst>
         </p14:section>
-        <p14:section name="본문" id="{DAF4527E-40C4-4A58-91A3-431AEAB2EBF9}">
+        <p14:section name="본문" id="{54AE8439-07C2-42C6-949D-CE1EE75719D1}">
           <p14:sldIdLst>
             <p14:sldId id="257"/>
             <p14:sldId id="258"/>
@@ -127,7 +127,7 @@
             <p14:sldId id="261"/>
           </p14:sldIdLst>
         </p14:section>
-        <p14:section name="마무리" id="{92FB26EC-E26B-4BE9-AE81-0E4D89FDB969}">
+        <p14:section name="마무리" id="{1B718D86-BB95-4A67-A888-8166B845CC7C}">
           <p14:sldIdLst>
             <p14:sldId id="262"/>
           </p14:sldIdLst>
@@ -1488,7 +1488,7 @@
             </a:lvl1pPr>
           </a:lstStyle>
           <a:p>
-            <a:fld id="{6BDB6675-0EED-41E1-AA40-DCD69593A18E}" type="slidenum">
+            <a:fld id="{CE442ECD-3B15-49A6-94D7-619F6ABEBFD7}" type="slidenum">
               <a:rPr lang="en-US"/>
               <a:t>‹#›</a:t>
             </a:fld>
@@ -2050,7 +2050,7 @@
             </a:lvl1pPr>
           </a:lstStyle>
           <a:p>
-            <a:fld id="{210AE519-CE72-4CCA-846C-2AA5A73CAD54}" type="slidenum">
+            <a:fld id="{2B281D1F-A22D-4F25-9428-7D9AD985F595}" type="slidenum">
               <a:rPr lang="en-US"/>
               <a:t>‹#›</a:t>
             </a:fld>
@@ -2639,7 +2639,7 @@
             </a:lvl1pPr>
           </a:lstStyle>
           <a:p>
-            <a:fld id="{26D52D79-3C02-4CDF-836D-903F090E91F9}" type="slidenum">
+            <a:fld id="{02E391E0-6BF0-442D-8CBD-EB263DCCF324}" type="slidenum">
               <a:rPr lang="en-US"/>
               <a:t>‹#›</a:t>
             </a:fld>
@@ -3527,7 +3527,7 @@
           <a:bodyPr/>
           <a:lstStyle/>
           <a:p>
-            <a:fld id="{C1624D24-183A-4240-B0C0-DC2DAAE8A959}" type="slidenum">
+            <a:fld id="{38DF4389-5AE0-4AB5-B953-F02C9755FCF6}" type="slidenum">
               <a:rPr lang="en-US"/>
               <a:t>‹#›</a:t>
             </a:fld>
@@ -3693,7 +3693,7 @@
           <a:bodyPr/>
           <a:lstStyle/>
           <a:p>
-            <a:fld id="{9D59790E-504B-4223-B21B-841FA601C4DE}" type="slidenum">
+            <a:fld id="{98154DA2-B74B-455C-B8E2-C0E9B1E08201}" type="slidenum">
               <a:rPr lang="en-US"/>
               <a:t>‹#›</a:t>
             </a:fld>
@@ -3859,7 +3859,7 @@
           <a:bodyPr/>
           <a:lstStyle/>
           <a:p>
-            <a:fld id="{12680C9C-9BF8-4612-9DC3-94A8106EC349}" type="slidenum">
+            <a:fld id="{65691506-09CE-4702-8957-3B356308EE29}" type="slidenum">
               <a:rPr lang="en-US"/>
               <a:t>‹#›</a:t>
             </a:fld>
@@ -4025,7 +4025,7 @@
           <a:bodyPr/>
           <a:lstStyle/>
           <a:p>
-            <a:fld id="{7EA2E9BA-C8EF-43B5-A072-1F84D6442C86}" type="slidenum">
+            <a:fld id="{EDA306AD-E21C-47F9-8837-82D8BE640165}" type="slidenum">
               <a:rPr lang="en-US"/>
               <a:t>‹#›</a:t>
             </a:fld>
@@ -4191,7 +4191,7 @@
           <a:bodyPr/>
           <a:lstStyle/>
           <a:p>
-            <a:fld id="{34066E1C-FC2D-4183-B83E-0368440230E6}" type="slidenum">
+            <a:fld id="{8E6CF0B6-3A9F-4582-9B00-F9318660A56B}" type="slidenum">
               <a:rPr lang="en-US"/>
               <a:t>‹#›</a:t>
             </a:fld>
